--- a/docs/마음이음_AI모델_가격정책_2026-10-01.pptx
+++ b/docs/마음이음_AI모델_가격정책_2026-10-01.pptx
@@ -14,6 +14,7 @@
     <p:sldId id="262" r:id="rId13"/>
     <p:sldId id="263" r:id="rId14"/>
     <p:sldId id="264" r:id="rId15"/>
+    <p:sldId id="265" r:id="rId16"/>
   </p:sldIdLst>
   <p:sldSz cx="18288000" cy="10287000" type="screen4x3"/>
   <p:notesSz cx="6858000" cy="9144000"/>
@@ -3565,7 +3566,7 @@
                 </a:solidFill>
                 <a:latin typeface="Pretendard SemiBold"/>
               </a:rPr>
-              <a:t>타사 비교 기반 </a:t>
+              <a:t xml:space="preserve">타사 비교 기반 </a:t>
             </a:r>
             <a:r>
               <a:rPr sz="5000" b="1">
@@ -3737,6 +3738,749 @@
                 <a:latin typeface="Pretendard"/>
               </a:rPr>
               <a:t>2026. 10. 1.   ㅣ   실측 280시행 · 적응형 30턴 대화   ㅣ   타사 벤치마크 반영</a:t>
+            </a:r>
+          </a:p>
+        </p:txBody>
+      </p:sp>
+    </p:spTree>
+  </p:cSld>
+  <p:clrMapOvr>
+    <a:masterClrMapping/>
+  </p:clrMapOvr>
+</p:sld>
+</file>
+
+<file path=ppt/slides/slide10.xml><?xml version="1.0" encoding="utf-8"?>
+<p:sld xmlns:a="http://schemas.openxmlformats.org/drawingml/2006/main" xmlns:p="http://schemas.openxmlformats.org/presentationml/2006/main" xmlns:r="http://schemas.openxmlformats.org/officeDocument/2006/relationships">
+  <p:cSld>
+    <p:spTree>
+      <p:nvGrpSpPr>
+        <p:cNvPr id="1" name=""/>
+        <p:cNvGrpSpPr/>
+        <p:nvPr/>
+      </p:nvGrpSpPr>
+      <p:grpSpPr/>
+      <p:pic>
+        <p:nvPicPr>
+          <p:cNvPr id="2" name="Picture 1" descr="image14.png"/>
+          <p:cNvPicPr>
+            <a:picLocks noChangeAspect="1"/>
+          </p:cNvPicPr>
+          <p:nvPr/>
+        </p:nvPicPr>
+        <p:blipFill>
+          <a:blip r:embed="rId2"/>
+          <a:stretch>
+            <a:fillRect/>
+          </a:stretch>
+        </p:blipFill>
+        <p:spPr>
+          <a:xfrm>
+            <a:off x="640080" y="1261872"/>
+            <a:ext cx="16980408" cy="8449056"/>
+          </a:xfrm>
+          <a:prstGeom prst="rect">
+            <a:avLst/>
+          </a:prstGeom>
+        </p:spPr>
+      </p:pic>
+      <p:pic>
+        <p:nvPicPr>
+          <p:cNvPr id="3" name="Picture 2" descr="image15.png"/>
+          <p:cNvPicPr>
+            <a:picLocks noChangeAspect="1"/>
+          </p:cNvPicPr>
+          <p:nvPr/>
+        </p:nvPicPr>
+        <p:blipFill>
+          <a:blip r:embed="rId3"/>
+          <a:stretch>
+            <a:fillRect/>
+          </a:stretch>
+        </p:blipFill>
+        <p:spPr>
+          <a:xfrm>
+            <a:off x="658368" y="530352"/>
+            <a:ext cx="16952976" cy="694944"/>
+          </a:xfrm>
+          <a:prstGeom prst="rect">
+            <a:avLst/>
+          </a:prstGeom>
+        </p:spPr>
+      </p:pic>
+      <p:sp>
+        <p:nvSpPr>
+          <p:cNvPr id="4" name="TextBox 3"/>
+          <p:cNvSpPr txBox="1"/>
+          <p:nvPr/>
+        </p:nvSpPr>
+        <p:spPr>
+          <a:xfrm>
+            <a:off x="1536192" y="713232"/>
+            <a:ext cx="2743200" cy="310896"/>
+          </a:xfrm>
+          <a:prstGeom prst="rect">
+            <a:avLst/>
+          </a:prstGeom>
+          <a:noFill/>
+        </p:spPr>
+        <p:txBody>
+          <a:bodyPr wrap="square" lIns="45720" rIns="45720" tIns="18288" bIns="18288" anchor="t">
+            <a:noAutofit/>
+          </a:bodyPr>
+          <a:lstStyle/>
+          <a:p>
+            <a:pPr algn="l"/>
+            <a:r>
+              <a:rPr sz="1300" b="0">
+                <a:solidFill>
+                  <a:srgbClr val="FFFFFF"/>
+                </a:solidFill>
+                <a:latin typeface="Pretendard"/>
+              </a:rPr>
+              <a:t>FIRST C&amp;D</a:t>
+            </a:r>
+          </a:p>
+        </p:txBody>
+      </p:sp>
+      <p:pic>
+        <p:nvPicPr>
+          <p:cNvPr id="5" name="Picture 4" descr="image16.png"/>
+          <p:cNvPicPr>
+            <a:picLocks noChangeAspect="1"/>
+          </p:cNvPicPr>
+          <p:nvPr/>
+        </p:nvPicPr>
+        <p:blipFill>
+          <a:blip r:embed="rId4"/>
+          <a:stretch>
+            <a:fillRect/>
+          </a:stretch>
+        </p:blipFill>
+        <p:spPr>
+          <a:xfrm>
+            <a:off x="15435072" y="758952"/>
+            <a:ext cx="237744" cy="219456"/>
+          </a:xfrm>
+          <a:prstGeom prst="rect">
+            <a:avLst/>
+          </a:prstGeom>
+        </p:spPr>
+      </p:pic>
+      <p:pic>
+        <p:nvPicPr>
+          <p:cNvPr id="6" name="Picture 5" descr="image17.png"/>
+          <p:cNvPicPr>
+            <a:picLocks noChangeAspect="1"/>
+          </p:cNvPicPr>
+          <p:nvPr/>
+        </p:nvPicPr>
+        <p:blipFill>
+          <a:blip r:embed="rId5"/>
+          <a:stretch>
+            <a:fillRect/>
+          </a:stretch>
+        </p:blipFill>
+        <p:spPr>
+          <a:xfrm>
+            <a:off x="15937992" y="685800"/>
+            <a:ext cx="365760" cy="365760"/>
+          </a:xfrm>
+          <a:prstGeom prst="rect">
+            <a:avLst/>
+          </a:prstGeom>
+        </p:spPr>
+      </p:pic>
+      <p:pic>
+        <p:nvPicPr>
+          <p:cNvPr id="7" name="Picture 6" descr="image18.png"/>
+          <p:cNvPicPr>
+            <a:picLocks noChangeAspect="1"/>
+          </p:cNvPicPr>
+          <p:nvPr/>
+        </p:nvPicPr>
+        <p:blipFill>
+          <a:blip r:embed="rId6"/>
+          <a:stretch>
+            <a:fillRect/>
+          </a:stretch>
+        </p:blipFill>
+        <p:spPr>
+          <a:xfrm>
+            <a:off x="16587216" y="740664"/>
+            <a:ext cx="256032" cy="265176"/>
+          </a:xfrm>
+          <a:prstGeom prst="rect">
+            <a:avLst/>
+          </a:prstGeom>
+        </p:spPr>
+      </p:pic>
+      <p:sp>
+        <p:nvSpPr>
+          <p:cNvPr id="8" name="TextBox 7"/>
+          <p:cNvSpPr txBox="1"/>
+          <p:nvPr/>
+        </p:nvSpPr>
+        <p:spPr>
+          <a:xfrm>
+            <a:off x="1764792" y="1764792"/>
+            <a:ext cx="1499616" cy="1179576"/>
+          </a:xfrm>
+          <a:prstGeom prst="rect">
+            <a:avLst/>
+          </a:prstGeom>
+          <a:noFill/>
+        </p:spPr>
+        <p:txBody>
+          <a:bodyPr wrap="square" lIns="45720" rIns="45720" tIns="18288" bIns="18288" anchor="t">
+            <a:noAutofit/>
+          </a:bodyPr>
+          <a:lstStyle/>
+          <a:p>
+            <a:pPr algn="l"/>
+            <a:r>
+              <a:rPr sz="6600" b="1">
+                <a:solidFill>
+                  <a:srgbClr val="4081ED"/>
+                </a:solidFill>
+                <a:latin typeface="Pretendard SemiBold"/>
+              </a:rPr>
+              <a:t>09</a:t>
+            </a:r>
+          </a:p>
+        </p:txBody>
+      </p:sp>
+      <p:sp>
+        <p:nvSpPr>
+          <p:cNvPr id="9" name="TextBox 8"/>
+          <p:cNvSpPr txBox="1"/>
+          <p:nvPr/>
+        </p:nvSpPr>
+        <p:spPr>
+          <a:xfrm>
+            <a:off x="3666744" y="1828800"/>
+            <a:ext cx="13551408" cy="1069848"/>
+          </a:xfrm>
+          <a:prstGeom prst="rect">
+            <a:avLst/>
+          </a:prstGeom>
+          <a:noFill/>
+        </p:spPr>
+        <p:txBody>
+          <a:bodyPr wrap="square" lIns="45720" rIns="45720" tIns="18288" bIns="18288" anchor="ctr">
+            <a:noAutofit/>
+          </a:bodyPr>
+          <a:lstStyle/>
+          <a:p>
+            <a:pPr algn="l"/>
+            <a:r>
+              <a:rPr sz="4000" b="1">
+                <a:solidFill>
+                  <a:srgbClr val="111111"/>
+                </a:solidFill>
+                <a:latin typeface="Pretendard SemiBold"/>
+              </a:rPr>
+              <a:t>원가 추가 절감 — 실측 A/B</a:t>
+            </a:r>
+          </a:p>
+        </p:txBody>
+      </p:sp>
+      <p:pic>
+        <p:nvPicPr>
+          <p:cNvPr id="10" name="Picture 9" descr="image19.png"/>
+          <p:cNvPicPr>
+            <a:picLocks noChangeAspect="1"/>
+          </p:cNvPicPr>
+          <p:nvPr/>
+        </p:nvPicPr>
+        <p:blipFill>
+          <a:blip r:embed="rId7"/>
+          <a:stretch>
+            <a:fillRect/>
+          </a:stretch>
+        </p:blipFill>
+        <p:spPr>
+          <a:xfrm>
+            <a:off x="1380744" y="3090672"/>
+            <a:ext cx="15517367" cy="9144"/>
+          </a:xfrm>
+          <a:prstGeom prst="rect">
+            <a:avLst/>
+          </a:prstGeom>
+        </p:spPr>
+      </p:pic>
+      <p:sp>
+        <p:nvSpPr>
+          <p:cNvPr id="11" name="Rounded Rectangle 10"/>
+          <p:cNvSpPr/>
+          <p:nvPr/>
+        </p:nvSpPr>
+        <p:spPr>
+          <a:xfrm>
+            <a:off x="2130552" y="3465576"/>
+            <a:ext cx="2468880" cy="475488"/>
+          </a:xfrm>
+          <a:prstGeom prst="roundRect">
+            <a:avLst>
+              <a:gd name="adj" fmla="val 50000"/>
+            </a:avLst>
+          </a:prstGeom>
+          <a:solidFill>
+            <a:srgbClr val="3E7EE7"/>
+          </a:solidFill>
+          <a:ln>
+            <a:noFill/>
+          </a:ln>
+          <a:effectLst/>
+        </p:spPr>
+        <p:style>
+          <a:lnRef idx="1">
+            <a:schemeClr val="accent1"/>
+          </a:lnRef>
+          <a:fillRef idx="3">
+            <a:schemeClr val="accent1"/>
+          </a:fillRef>
+          <a:effectRef idx="2">
+            <a:schemeClr val="accent1"/>
+          </a:effectRef>
+          <a:fontRef idx="minor">
+            <a:schemeClr val="lt1"/>
+          </a:fontRef>
+        </p:style>
+        <p:txBody>
+          <a:bodyPr rtlCol="0" anchor="ctr" wrap="none">
+            <a:noAutofit/>
+          </a:bodyPr>
+          <a:lstStyle/>
+          <a:p>
+            <a:pPr algn="ctr"/>
+            <a:r>
+              <a:rPr sz="2000" b="1">
+                <a:solidFill>
+                  <a:srgbClr val="FFFFFF"/>
+                </a:solidFill>
+                <a:latin typeface="Pretendard SemiBold"/>
+              </a:rPr>
+              <a:t>측정 완료</a:t>
+            </a:r>
+          </a:p>
+        </p:txBody>
+      </p:sp>
+      <p:sp>
+        <p:nvSpPr>
+          <p:cNvPr id="12" name="TextBox 11"/>
+          <p:cNvSpPr txBox="1"/>
+          <p:nvPr/>
+        </p:nvSpPr>
+        <p:spPr>
+          <a:xfrm>
+            <a:off x="16157448" y="9893808"/>
+            <a:ext cx="548640" cy="274320"/>
+          </a:xfrm>
+          <a:prstGeom prst="rect">
+            <a:avLst/>
+          </a:prstGeom>
+          <a:noFill/>
+        </p:spPr>
+        <p:txBody>
+          <a:bodyPr wrap="square" lIns="45720" rIns="45720" tIns="18288" bIns="18288" anchor="t">
+            <a:noAutofit/>
+          </a:bodyPr>
+          <a:lstStyle/>
+          <a:p>
+            <a:pPr algn="r"/>
+            <a:r>
+              <a:rPr sz="1200" b="0">
+                <a:solidFill>
+                  <a:srgbClr val="858585"/>
+                </a:solidFill>
+                <a:latin typeface="Pretendard"/>
+              </a:rPr>
+              <a:t>10</a:t>
+            </a:r>
+          </a:p>
+        </p:txBody>
+      </p:sp>
+      <p:sp>
+        <p:nvSpPr>
+          <p:cNvPr id="13" name="Rounded Rectangle 12"/>
+          <p:cNvSpPr/>
+          <p:nvPr/>
+        </p:nvSpPr>
+        <p:spPr>
+          <a:xfrm>
+            <a:off x="1764792" y="4343400"/>
+            <a:ext cx="4572000" cy="3063240"/>
+          </a:xfrm>
+          <a:prstGeom prst="roundRect">
+            <a:avLst>
+              <a:gd name="adj" fmla="val 6000"/>
+            </a:avLst>
+          </a:prstGeom>
+          <a:solidFill>
+            <a:srgbClr val="EEF3FC"/>
+          </a:solidFill>
+          <a:ln>
+            <a:noFill/>
+          </a:ln>
+          <a:effectLst/>
+        </p:spPr>
+        <p:style>
+          <a:lnRef idx="1">
+            <a:schemeClr val="accent1"/>
+          </a:lnRef>
+          <a:fillRef idx="3">
+            <a:schemeClr val="accent1"/>
+          </a:fillRef>
+          <a:effectRef idx="2">
+            <a:schemeClr val="accent1"/>
+          </a:effectRef>
+          <a:fontRef idx="minor">
+            <a:schemeClr val="lt1"/>
+          </a:fontRef>
+        </p:style>
+        <p:txBody>
+          <a:bodyPr rtlCol="0" anchor="ctr" wrap="square" lIns="256032" rIns="256032">
+            <a:noAutofit/>
+          </a:bodyPr>
+          <a:lstStyle/>
+          <a:p>
+            <a:pPr algn="ctr">
+              <a:spcAft>
+                <a:spcPts val="800"/>
+              </a:spcAft>
+            </a:pPr>
+            <a:r>
+              <a:rPr sz="2400" b="1">
+                <a:solidFill>
+                  <a:srgbClr val="4081ED"/>
+                </a:solidFill>
+                <a:latin typeface="Pretendard SemiBold"/>
+              </a:rPr>
+              <a:t>①</a:t>
+            </a:r>
+          </a:p>
+          <a:p>
+            <a:pPr algn="ctr"/>
+            <a:r>
+              <a:rPr sz="2400" b="1">
+                <a:solidFill>
+                  <a:srgbClr val="4081ED"/>
+                </a:solidFill>
+                <a:latin typeface="Pretendard SemiBold"/>
+              </a:rPr>
+              <a:t>안 쓰던 캐시가 있었다</a:t>
+            </a:r>
+          </a:p>
+          <a:p>
+            <a:pPr algn="ctr"/>
+            <a:r>
+              <a:rPr sz="2400" b="1">
+                <a:solidFill>
+                  <a:srgbClr val="4081ED"/>
+                </a:solidFill>
+                <a:latin typeface="Pretendard SemiBold"/>
+              </a:rPr>
+              <a:t>구현은 돼 있었지만</a:t>
+            </a:r>
+          </a:p>
+          <a:p>
+            <a:pPr algn="ctr"/>
+            <a:r>
+              <a:rPr sz="2400" b="1">
+                <a:solidFill>
+                  <a:srgbClr val="4081ED"/>
+                </a:solidFill>
+                <a:latin typeface="Pretendard SemiBold"/>
+              </a:rPr>
+              <a:t>한 번도 켠 적이 없었다</a:t>
+            </a:r>
+          </a:p>
+          <a:p>
+            <a:pPr algn="ctr"/>
+            <a:r>
+              <a:rPr sz="2400" b="1">
+                <a:solidFill>
+                  <a:srgbClr val="4081ED"/>
+                </a:solidFill>
+                <a:latin typeface="Pretendard SemiBold"/>
+              </a:rPr>
+              <a:t>입력 적중 18% → 86%</a:t>
+            </a:r>
+          </a:p>
+        </p:txBody>
+      </p:sp>
+      <p:sp>
+        <p:nvSpPr>
+          <p:cNvPr id="14" name="Rounded Rectangle 13"/>
+          <p:cNvSpPr/>
+          <p:nvPr/>
+        </p:nvSpPr>
+        <p:spPr>
+          <a:xfrm>
+            <a:off x="6885432" y="4343400"/>
+            <a:ext cx="4572000" cy="3063240"/>
+          </a:xfrm>
+          <a:prstGeom prst="roundRect">
+            <a:avLst>
+              <a:gd name="adj" fmla="val 6000"/>
+            </a:avLst>
+          </a:prstGeom>
+          <a:solidFill>
+            <a:srgbClr val="EEF3FC"/>
+          </a:solidFill>
+          <a:ln>
+            <a:noFill/>
+          </a:ln>
+          <a:effectLst/>
+        </p:spPr>
+        <p:style>
+          <a:lnRef idx="1">
+            <a:schemeClr val="accent1"/>
+          </a:lnRef>
+          <a:fillRef idx="3">
+            <a:schemeClr val="accent1"/>
+          </a:fillRef>
+          <a:effectRef idx="2">
+            <a:schemeClr val="accent1"/>
+          </a:effectRef>
+          <a:fontRef idx="minor">
+            <a:schemeClr val="lt1"/>
+          </a:fontRef>
+        </p:style>
+        <p:txBody>
+          <a:bodyPr rtlCol="0" anchor="ctr" wrap="square" lIns="256032" rIns="256032">
+            <a:noAutofit/>
+          </a:bodyPr>
+          <a:lstStyle/>
+          <a:p>
+            <a:pPr algn="ctr">
+              <a:spcAft>
+                <a:spcPts val="800"/>
+              </a:spcAft>
+            </a:pPr>
+            <a:r>
+              <a:rPr sz="2400" b="1">
+                <a:solidFill>
+                  <a:srgbClr val="4081ED"/>
+                </a:solidFill>
+                <a:latin typeface="Pretendard SemiBold"/>
+              </a:rPr>
+              <a:t>②</a:t>
+            </a:r>
+          </a:p>
+          <a:p>
+            <a:pPr algn="ctr"/>
+            <a:r>
+              <a:rPr sz="2400" b="1">
+                <a:solidFill>
+                  <a:srgbClr val="4081ED"/>
+                </a:solidFill>
+                <a:latin typeface="Pretendard SemiBold"/>
+              </a:rPr>
+              <a:t>토큰 비용 −17%</a:t>
+            </a:r>
+          </a:p>
+          <a:p>
+            <a:pPr algn="ctr"/>
+            <a:r>
+              <a:rPr sz="2400" b="1">
+                <a:solidFill>
+                  <a:srgbClr val="4081ED"/>
+                </a:solidFill>
+                <a:latin typeface="Pretendard SemiBold"/>
+              </a:rPr>
+              <a:t>동일 6턴 A/B 실측</a:t>
+            </a:r>
+          </a:p>
+          <a:p>
+            <a:pPr algn="ctr"/>
+            <a:r>
+              <a:rPr sz="2400" b="1">
+                <a:solidFill>
+                  <a:srgbClr val="4081ED"/>
+                </a:solidFill>
+                <a:latin typeface="Pretendard SemiBold"/>
+              </a:rPr>
+              <a:t>턴당 10원 → 8원</a:t>
+            </a:r>
+          </a:p>
+          <a:p>
+            <a:pPr algn="ctr"/>
+            <a:r>
+              <a:rPr sz="2400" b="1">
+                <a:solidFill>
+                  <a:srgbClr val="4081ED"/>
+                </a:solidFill>
+                <a:latin typeface="Pretendard SemiBold"/>
+              </a:rPr>
+              <a:t>모델·프롬프트 동일 = 품질 동일</a:t>
+            </a:r>
+          </a:p>
+        </p:txBody>
+      </p:sp>
+      <p:sp>
+        <p:nvSpPr>
+          <p:cNvPr id="15" name="Rounded Rectangle 14"/>
+          <p:cNvSpPr/>
+          <p:nvPr/>
+        </p:nvSpPr>
+        <p:spPr>
+          <a:xfrm>
+            <a:off x="12006072" y="4343400"/>
+            <a:ext cx="4572000" cy="3063240"/>
+          </a:xfrm>
+          <a:prstGeom prst="roundRect">
+            <a:avLst>
+              <a:gd name="adj" fmla="val 6000"/>
+            </a:avLst>
+          </a:prstGeom>
+          <a:solidFill>
+            <a:srgbClr val="EEF3FC"/>
+          </a:solidFill>
+          <a:ln>
+            <a:noFill/>
+          </a:ln>
+          <a:effectLst/>
+        </p:spPr>
+        <p:style>
+          <a:lnRef idx="1">
+            <a:schemeClr val="accent1"/>
+          </a:lnRef>
+          <a:fillRef idx="3">
+            <a:schemeClr val="accent1"/>
+          </a:fillRef>
+          <a:effectRef idx="2">
+            <a:schemeClr val="accent1"/>
+          </a:effectRef>
+          <a:fontRef idx="minor">
+            <a:schemeClr val="lt1"/>
+          </a:fontRef>
+        </p:style>
+        <p:txBody>
+          <a:bodyPr rtlCol="0" anchor="ctr" wrap="square" lIns="256032" rIns="256032">
+            <a:noAutofit/>
+          </a:bodyPr>
+          <a:lstStyle/>
+          <a:p>
+            <a:pPr algn="ctr">
+              <a:spcAft>
+                <a:spcPts val="800"/>
+              </a:spcAft>
+            </a:pPr>
+            <a:r>
+              <a:rPr sz="2400" b="1">
+                <a:solidFill>
+                  <a:srgbClr val="4081ED"/>
+                </a:solidFill>
+                <a:latin typeface="Pretendard SemiBold"/>
+              </a:rPr>
+              <a:t>③</a:t>
+            </a:r>
+          </a:p>
+          <a:p>
+            <a:pPr algn="ctr"/>
+            <a:r>
+              <a:rPr sz="2400" b="1">
+                <a:solidFill>
+                  <a:srgbClr val="4081ED"/>
+                </a:solidFill>
+                <a:latin typeface="Pretendard SemiBold"/>
+              </a:rPr>
+              <a:t>단, 조건부다</a:t>
+            </a:r>
+          </a:p>
+          <a:p>
+            <a:pPr algn="ctr"/>
+            <a:r>
+              <a:rPr sz="2400" b="1">
+                <a:solidFill>
+                  <a:srgbClr val="4081ED"/>
+                </a:solidFill>
+                <a:latin typeface="Pretendard SemiBold"/>
+              </a:rPr>
+              <a:t>저장·생성료를 반영하면</a:t>
+            </a:r>
+          </a:p>
+          <a:p>
+            <a:pPr algn="ctr"/>
+            <a:r>
+              <a:rPr sz="2400" b="1">
+                <a:solidFill>
+                  <a:srgbClr val="4081ED"/>
+                </a:solidFill>
+                <a:latin typeface="Pretendard SemiBold"/>
+              </a:rPr>
+              <a:t>손익분기 10분당 3.4턴</a:t>
+            </a:r>
+          </a:p>
+          <a:p>
+            <a:pPr algn="ctr"/>
+            <a:r>
+              <a:rPr sz="2400" b="1">
+                <a:solidFill>
+                  <a:srgbClr val="4081ED"/>
+                </a:solidFill>
+                <a:latin typeface="Pretendard SemiBold"/>
+              </a:rPr>
+              <a:t>서버리스 공유 수정이 선행</a:t>
+            </a:r>
+          </a:p>
+        </p:txBody>
+      </p:sp>
+      <p:sp>
+        <p:nvSpPr>
+          <p:cNvPr id="16" name="Rounded Rectangle 15"/>
+          <p:cNvSpPr/>
+          <p:nvPr/>
+        </p:nvSpPr>
+        <p:spPr>
+          <a:xfrm>
+            <a:off x="1764792" y="7955279"/>
+            <a:ext cx="14813280" cy="868680"/>
+          </a:xfrm>
+          <a:prstGeom prst="roundRect">
+            <a:avLst>
+              <a:gd name="adj" fmla="val 30000"/>
+            </a:avLst>
+          </a:prstGeom>
+          <a:solidFill>
+            <a:srgbClr val="3E7EE7"/>
+          </a:solidFill>
+          <a:ln>
+            <a:noFill/>
+          </a:ln>
+          <a:effectLst/>
+        </p:spPr>
+        <p:style>
+          <a:lnRef idx="1">
+            <a:schemeClr val="accent1"/>
+          </a:lnRef>
+          <a:fillRef idx="3">
+            <a:schemeClr val="accent1"/>
+          </a:fillRef>
+          <a:effectRef idx="2">
+            <a:schemeClr val="accent1"/>
+          </a:effectRef>
+          <a:fontRef idx="minor">
+            <a:schemeClr val="lt1"/>
+          </a:fontRef>
+        </p:style>
+        <p:txBody>
+          <a:bodyPr rtlCol="0" anchor="ctr" wrap="none">
+            <a:noAutofit/>
+          </a:bodyPr>
+          <a:lstStyle/>
+          <a:p>
+            <a:pPr algn="ctr"/>
+            <a:r>
+              <a:rPr sz="1900" b="1">
+                <a:solidFill>
+                  <a:srgbClr val="FFFFFF"/>
+                </a:solidFill>
+                <a:latin typeface="Pretendard SemiBold"/>
+              </a:rPr>
+              <a:t>품질을 건드리지 않고 원가를 더 낮출 여지가 있다 — 남은 레버 7건(분석기 thinking·2단 라우팅·일 1회 배치 등)은 품질 검증 통과분만 적용</a:t>
             </a:r>
           </a:p>
         </p:txBody>
@@ -7974,7 +8718,7 @@
                 </a:solidFill>
                 <a:latin typeface="Pretendard"/>
               </a:rPr>
-              <a:t>· 통화당 약 1분 15초</a:t>
+              <a:t xml:space="preserve">· 통화당 약 1분 15초</a:t>
             </a:r>
           </a:p>
           <a:p>
@@ -7998,7 +8742,7 @@
                 </a:solidFill>
                 <a:latin typeface="Pretendard"/>
               </a:rPr>
-              <a:t>· 응답률 96%</a:t>
+              <a:t xml:space="preserve">· 응답률 96%</a:t>
             </a:r>
           </a:p>
         </p:txBody>

--- a/docs/마음이음_AI모델_가격정책_2026-10-01.pptx
+++ b/docs/마음이음_AI모델_가격정책_2026-10-01.pptx
@@ -7270,7 +7270,7 @@
                           </a:solidFill>
                           <a:latin typeface="Pretendard"/>
                         </a:rPr>
-                        <a:t>3.8-flash  ·  동반자 합 $0.0038</a:t>
+                        <a:t>3.8-flash  ·  동반자 합 $0.0036</a:t>
                       </a:r>
                     </a:p>
                   </a:txBody>
@@ -7446,7 +7446,7 @@
                           </a:solidFill>
                           <a:latin typeface="Pretendard"/>
                         </a:rPr>
-                        <a:t>3.8-flash  ·  분석기 합 $0.0031</a:t>
+                        <a:t>3.8-flash  ·  분석기 합 $0.0033</a:t>
                       </a:r>
                     </a:p>
                   </a:txBody>
@@ -11993,7 +11993,7 @@
         <p:spPr>
           <a:xfrm>
             <a:off x="5394960" y="5321808"/>
-            <a:ext cx="1520190" cy="566928"/>
+            <a:ext cx="1426738" cy="566928"/>
           </a:xfrm>
           <a:prstGeom prst="roundRect">
             <a:avLst>
@@ -12036,7 +12036,7 @@
                 </a:solidFill>
                 <a:latin typeface="Pretendard SemiBold"/>
               </a:rPr>
-              <a:t>4,750</a:t>
+              <a:t>4,458</a:t>
             </a:r>
           </a:p>
         </p:txBody>
@@ -12049,8 +12049,8 @@
         </p:nvSpPr>
         <p:spPr>
           <a:xfrm>
-            <a:off x="6915150" y="5321808"/>
-            <a:ext cx="1244955" cy="566928"/>
+            <a:off x="6821698" y="5321808"/>
+            <a:ext cx="1338407" cy="566928"/>
           </a:xfrm>
           <a:prstGeom prst="roundRect">
             <a:avLst>
@@ -12093,7 +12093,7 @@
                 </a:solidFill>
                 <a:latin typeface="Pretendard SemiBold"/>
               </a:rPr>
-              <a:t>3,890</a:t>
+              <a:t>4,182</a:t>
             </a:r>
           </a:p>
         </p:txBody>
@@ -12479,7 +12479,7 @@
         <p:spPr>
           <a:xfrm>
             <a:off x="5394960" y="7653527"/>
-            <a:ext cx="2534716" cy="566928"/>
+            <a:ext cx="2377897" cy="566928"/>
           </a:xfrm>
           <a:prstGeom prst="roundRect">
             <a:avLst>
@@ -12522,7 +12522,7 @@
                 </a:solidFill>
                 <a:latin typeface="Pretendard SemiBold"/>
               </a:rPr>
-              <a:t>7,920</a:t>
+              <a:t>7,430</a:t>
             </a:r>
           </a:p>
         </p:txBody>
@@ -12535,8 +12535,8 @@
         </p:nvSpPr>
         <p:spPr>
           <a:xfrm>
-            <a:off x="7929676" y="7653527"/>
-            <a:ext cx="2073859" cy="566928"/>
+            <a:off x="7772857" y="7653527"/>
+            <a:ext cx="2230678" cy="566928"/>
           </a:xfrm>
           <a:prstGeom prst="roundRect">
             <a:avLst>
@@ -12579,7 +12579,7 @@
                 </a:solidFill>
                 <a:latin typeface="Pretendard SemiBold"/>
               </a:rPr>
-              <a:t>6,480</a:t>
+              <a:t>6,970</a:t>
             </a:r>
           </a:p>
         </p:txBody>

--- a/docs/마음이음_AI모델_가격정책_2026-10-01.pptx
+++ b/docs/마음이음_AI모델_가격정책_2026-10-01.pptx
@@ -10214,7 +10214,7 @@
                 </a:solidFill>
                 <a:latin typeface="Pretendard SemiBold"/>
               </a:rPr>
-              <a:t>우리 실측 중앙값</a:t>
+              <a:t>우리 실측 — 표본 부족</a:t>
             </a:r>
           </a:p>
           <a:p>
@@ -10230,7 +10230,7 @@
                 </a:solidFill>
                 <a:latin typeface="Pretendard SemiBold"/>
               </a:rPr>
-              <a:t>하루 15턴</a:t>
+              <a:t>하루 26턴</a:t>
             </a:r>
           </a:p>
           <a:p>
@@ -10246,7 +10246,7 @@
                 </a:solidFill>
                 <a:latin typeface="Pretendard"/>
               </a:rPr>
-              <a:t>사람이 쓴 40일 기준 (p75 26턴)</a:t>
+              <a:t>실사용 6계정 · 8일분 (p75 34)</a:t>
             </a:r>
           </a:p>
         </p:txBody>
@@ -10281,7 +10281,7 @@
                 </a:solidFill>
                 <a:latin typeface="Pretendard"/>
               </a:rPr>
-              <a:t>※ 타사는 대화 모델만 돌리지만 우리는 매 턴 인지 분석기가 함께 돈다 — 같은 턴 수라도 원가가 높다. 타사의 '건'은 사용자 메시지 1건으로 우리 '턴'과 같은 단위다. 우리 중앙값은 내부·관계자 계정 40일 기준이며 외부 실사용자 데이터는 아직 없다.</a:t>
+              <a:t>※ 타사는 대화 모델만 돌리지만 우리는 매 턴 인지 분석기가 함께 돈다 — 같은 턴 수라도 원가가 높다. 타사의 '건'은 사용자 메시지 1건으로 우리 '턴'과 같은 단위다. ⚠ 우리 수치는 표본이 8 사용자-일(6계정)에 불과하다 — 이전 집계(중앙값 15턴)는 자동화 테스트 계정 311개가 실사용자로 섞여 있었고, 걸러내니 전체 발화의 97%가 테스트였다(2026-10-02 정정). 따라서 상한은 우리 데이터가 아니라 업계 벤치마크를 근거로 정해야 한다.</a:t>
             </a:r>
           </a:p>
         </p:txBody>
@@ -12653,7 +12653,7 @@
                 </a:solidFill>
                 <a:latin typeface="Pretendard"/>
               </a:rPr>
-              <a:t>※ '최대 원가'는 상한을 매일 끝까지 쓰는 최악 가정. 실측 중앙값(하루 15턴)이면 원가 4,320원이라 두 안 모두 흑자다. 안 A는 사용량이 늘수록 적자로 돌아서고, 안 B는 상한까지 써도 2026년 단가에선 흑자다. ⚠ 2027년 단가(턴당 14.6원)에서는 안 B의 최대 원가가 21,900원이 되어 역전된다 — 연말 전 모델 재검토가 이 가격의 전제다.</a:t>
+              <a:t>※ '최대 원가'는 상한을 매일 끝까지 쓰는 최악 가정. 정정된 실측 중앙값(하루 26턴, 표본 8일)이면 원가 7,488원으로 두 안 모두 흑자지만 안 A의 여유는 927원뿐이다. 안 A는 사용량이 늘수록 적자로 돌아서고, 안 B는 상한까지 써도 2026년 단가에선 흑자다. ⚠ 2027년 단가(턴당 14.6원)에서는 안 B의 최대 원가가 21,900원이 되어 역전된다 — 연말 전 모델 재검토가 이 가격의 전제다.</a:t>
             </a:r>
           </a:p>
         </p:txBody>
@@ -13290,7 +13290,7 @@
                 </a:solidFill>
                 <a:latin typeface="Pretendard SemiBold"/>
               </a:rPr>
-              <a:t>하루 20턴 (실측 중앙값 15턴의 1.3배)</a:t>
+              <a:t>하루 20턴 — 업계(50~70) 하단 · 자체 표본 부족</a:t>
             </a:r>
           </a:p>
         </p:txBody>

--- a/docs/마음이음_AI모델_가격정책_2026-10-01.pptx
+++ b/docs/마음이음_AI모델_가격정책_2026-10-01.pptx
@@ -4948,7 +4948,7 @@
                 </a:solidFill>
                 <a:latin typeface="Pretendard SemiBold"/>
               </a:rPr>
-              <a:t>턴당 9.6원</a:t>
+              <a:t>턴당 13.5원(실측)</a:t>
             </a:r>
           </a:p>
         </p:txBody>
@@ -5223,7 +5223,7 @@
                 </a:solidFill>
                 <a:latin typeface="Pretendard SemiBold"/>
               </a:rPr>
-              <a:t>모델 최적화는 끝났고 남은 변수는 가격 — 업계 무료 상한(50~70건)과 우리 원가(턴당 9.6원)가 가격 하한을 결정한다</a:t>
+              <a:t>모델 최적화는 끝났고 남은 변수는 가격 — 업계 무료 상한(50~70건)과 우리 원가(실측 턴당 13.5원 — 당초 추정 9.6원보다 40% 높다)가 가격 하한을 결정한다</a:t>
             </a:r>
           </a:p>
         </p:txBody>
@@ -7491,7 +7491,7 @@
                           </a:solidFill>
                           <a:latin typeface="Pretendard SemiBold"/>
                         </a:rPr>
-                        <a:t>턴당 합계</a:t>
+                        <a:t>턴당 합계(실측)</a:t>
                       </a:r>
                     </a:p>
                   </a:txBody>
@@ -7534,7 +7534,7 @@
                           </a:solidFill>
                           <a:latin typeface="Pretendard SemiBold"/>
                         </a:rPr>
-                        <a:t>$0.0069  ≈  9.6원</a:t>
+                        <a:t>$0.0097  ≈  13.5원</a:t>
                       </a:r>
                     </a:p>
                   </a:txBody>
@@ -10605,7 +10605,7 @@
                 </a:solidFill>
                 <a:latin typeface="Pretendard SemiBold"/>
               </a:rPr>
-              <a:t>턴당 9.6원 기준</a:t>
+              <a:t>턴당 13.5원 (실측)</a:t>
             </a:r>
           </a:p>
         </p:txBody>
@@ -10812,7 +10812,7 @@
                 </a:solidFill>
                 <a:latin typeface="Pretendard SemiBold"/>
               </a:rPr>
-              <a:t>20,160원</a:t>
+              <a:t>28,350원</a:t>
             </a:r>
           </a:p>
         </p:txBody>
@@ -10940,7 +10940,7 @@
                 </a:solidFill>
                 <a:latin typeface="Pretendard SemiBold"/>
               </a:rPr>
-              <a:t>14,400원</a:t>
+              <a:t>20,250원</a:t>
             </a:r>
           </a:p>
         </p:txBody>
@@ -11068,7 +11068,7 @@
                 </a:solidFill>
                 <a:latin typeface="Pretendard SemiBold"/>
               </a:rPr>
-              <a:t>5,760원</a:t>
+              <a:t>8,100원</a:t>
             </a:r>
           </a:p>
         </p:txBody>
@@ -11760,7 +11760,7 @@
                 </a:solidFill>
                 <a:latin typeface="Pretendard SemiBold"/>
               </a:rPr>
-              <a:t>→ 진입 쉬움, 최악 가정에선 −225원 (≈ 손익분기)</a:t>
+              <a:t>→ 실측 원가로는 최악 가정에서 −3,735원 적자</a:t>
             </a:r>
           </a:p>
         </p:txBody>
@@ -12036,7 +12036,7 @@
                 </a:solidFill>
                 <a:latin typeface="Pretendard SemiBold"/>
               </a:rPr>
-              <a:t>4,458</a:t>
+              <a:t>6,500</a:t>
             </a:r>
           </a:p>
         </p:txBody>
@@ -12093,7 +12093,7 @@
                 </a:solidFill>
                 <a:latin typeface="Pretendard SemiBold"/>
               </a:rPr>
-              <a:t>4,182</a:t>
+              <a:t>5,650</a:t>
             </a:r>
           </a:p>
         </p:txBody>
@@ -12128,7 +12128,7 @@
                 </a:solidFill>
                 <a:latin typeface="Pretendard SemiBold"/>
               </a:rPr>
-              <a:t>8,640원</a:t>
+              <a:t>12,150원</a:t>
             </a:r>
           </a:p>
         </p:txBody>
@@ -12246,7 +12246,7 @@
                 </a:solidFill>
                 <a:latin typeface="Pretendard SemiBold"/>
               </a:rPr>
-              <a:t>→ Replika 동급 가격 · 최악 가정에도 +2,515원 흑자</a:t>
+              <a:t>→ 실측 원가로는 최악 가정에서 −3,335원 적자 (초안의 +2,515원 흑자는 뒤집혔다)</a:t>
             </a:r>
           </a:p>
         </p:txBody>
@@ -12522,7 +12522,7 @@
                 </a:solidFill>
                 <a:latin typeface="Pretendard SemiBold"/>
               </a:rPr>
-              <a:t>7,430</a:t>
+              <a:t>10,834</a:t>
             </a:r>
           </a:p>
         </p:txBody>
@@ -12579,7 +12579,7 @@
                 </a:solidFill>
                 <a:latin typeface="Pretendard SemiBold"/>
               </a:rPr>
-              <a:t>6,970</a:t>
+              <a:t>9,416</a:t>
             </a:r>
           </a:p>
         </p:txBody>
@@ -12614,7 +12614,7 @@
                 </a:solidFill>
                 <a:latin typeface="Pretendard SemiBold"/>
               </a:rPr>
-              <a:t>14,400원</a:t>
+              <a:t>20,250원</a:t>
             </a:r>
           </a:p>
         </p:txBody>
@@ -12653,7 +12653,7 @@
                 </a:solidFill>
                 <a:latin typeface="Pretendard"/>
               </a:rPr>
-              <a:t>※ '최대 원가'는 상한을 매일 끝까지 쓰는 최악 가정. 정정된 실측 중앙값(하루 26턴, 표본 8일)이면 원가 7,488원으로 두 안 모두 흑자지만 안 A의 여유는 927원뿐이다. 안 A는 사용량이 늘수록 적자로 돌아서고, 안 B는 상한까지 써도 2026년 단가에선 흑자다. ⚠ 2027년 단가(턴당 14.6원)에서는 안 B의 최대 원가가 21,900원이 되어 역전된다 — 연말 전 모델 재검토가 이 가격의 전제다.</a:t>
+              <a:t>※ 원가는 2026-10-02 실측이다 — 30턴 e2e 2회(13.44·13.60원)로 턴당 13.5원. 당초 추정 9.6원보다 40% 높다. 원인은 입력 토큰(호출당 약 1만 토큰)이 비용의 82%를 차지하는 구조다 — 안전 규칙이 프롬프트에 쌓이며 커졌다. ⚠ 두 안 모두 상한까지 쓰면 적자다. 중앙값(26턴)이면 월 10,530원이라 안 B만 흑자(+6,385원). 선택지는 셋: ① 상한을 낮춘다(안 B를 35턴 이하로) ② 가격을 올린다 ③ 프롬프트 입력 토큰을 줄인다. ③은 품질 검증을 통과한 분만 — 확인 턴·검진·응급 판정은 최적화 대상에서 제외한다. 2027년 3.8-flash 정가 전환 시 추가 상승이 겹친다.</a:t>
             </a:r>
           </a:p>
         </p:txBody>
@@ -13151,7 +13151,7 @@
                 </a:solidFill>
                 <a:latin typeface="Pretendard SemiBold"/>
               </a:rPr>
-              <a:t>확정 — 확인 턴 3.8-flash · 턴당 9.6원</a:t>
+              <a:t>확정 — 확인 턴 3.8-flash · 턴당 13.5원(실측)</a:t>
             </a:r>
           </a:p>
         </p:txBody>
